--- a/skills/presentations/assets/pptx/examples/02-results-demo.pptx
+++ b/skills/presentations/assets/pptx/examples/02-results-demo.pptx
@@ -5,16 +5,16 @@
     <p:sldMasterId xmlns:r="http://schemas.openxmlformats.org/officeDocument/2006/relationships" id="2147483648" r:id="rId1"/>
   </p:sldMasterIdLst>
   <p:notesMasterIdLst>
-    <p:notesMasterId r:id="R1ccebc9207ea486e"/>
+    <p:notesMasterId r:id="R4224fa68b39e4517"/>
   </p:notesMasterIdLst>
   <p:sldIdLst>
-    <p:sldId id="256" r:id="R17d748b613d34444"/>
-    <p:sldId id="257" r:id="R96883aa7a4f449c8"/>
-    <p:sldId id="258" r:id="Rfca41b8b44ca4c75"/>
-    <p:sldId id="259" r:id="R7dd94f37df8b47f1"/>
-    <p:sldId id="260" r:id="R57199d66af1f4de9"/>
-    <p:sldId id="261" r:id="R200c1dc0cacd4fcd"/>
-    <p:sldId id="262" r:id="Re834e4129b1b45af"/>
+    <p:sldId id="256" r:id="R8730d3087adc42af"/>
+    <p:sldId id="257" r:id="Rb1642a00b74a483d"/>
+    <p:sldId id="258" r:id="Rb317d4b461f646a5"/>
+    <p:sldId id="259" r:id="Rebc9313b5b3a4f47"/>
+    <p:sldId id="260" r:id="R5019e48255ab45e9"/>
+    <p:sldId id="261" r:id="R88d315babf2c4312"/>
+    <p:sldId id="262" r:id="R15f21dcc5b7240fa"/>
   </p:sldIdLst>
   <p:sldSz cx="12192000" cy="6858000"/>
   <p:notesSz cx="6858000" cy="9144000"/>
@@ -1371,7 +1371,7 @@
                 <a:latin typeface="Calibri"/>
                 <a:ea typeface="Calibri"/>
               </a:rPr>
-              <a:t>Status: GREEN  ·  Day-3 Linux boot on A0  ·  Ask: approve customer sample plan for 6/30</a:t>
+              <a:t>Status: GREEN  ·  Day-3 Linux boot on A0 (silicon 5/12)  ·  Ask: sample plan for 6/30</a:t>
             </a:r>
           </a:p>
         </p:txBody>
@@ -1406,7 +1406,7 @@
                 <a:latin typeface="Calibri"/>
                 <a:ea typeface="Calibri"/>
               </a:rPr>
-              <a:t>Outcome: Aurora A0 brought up; UART + DDR init + Linux prompt on day 3 (target was day 5).</a:t>
+              <a:t>Outcome: Aurora A0 (fab return 2026-05-12) brought up; UART + DDR + Linux prompt on day 3 (target day 5).</a:t>
             </a:r>
           </a:p>
           <a:p xmlns:a="http://schemas.openxmlformats.org/drawingml/2006/main">
@@ -1454,7 +1454,19 @@
                 <a:latin typeface="Calibri"/>
                 <a:ea typeface="Calibri"/>
               </a:rPr>
-              <a:t>Residual: USB3 not yet stable (known; tracked under ECO-22); not on sample critical path.</a:t>
+              <a:t>Residual: USB3 not yet stable (ECO-22); not on sample critical path.</a:t>
+            </a:r>
+          </a:p>
+          <a:p xmlns:a="http://schemas.openxmlformats.org/drawingml/2006/main">
+            <a:r>
+              <a:rPr lang="en-US" sz="1600" b="0">
+                <a:solidFill>
+                  <a:srgbClr val="1A202C"/>
+                </a:solidFill>
+                <a:latin typeface="Calibri"/>
+                <a:ea typeface="Calibri"/>
+              </a:rPr>
+              <a:t>Prior: AON Option B (3/20) held RTL freeze 4/10 → tape-out 4/28 → this bring-up.</a:t>
             </a:r>
           </a:p>
         </p:txBody>
@@ -1877,7 +1889,7 @@
                 <a:latin typeface="Calibri"/>
                 <a:ea typeface="Calibri"/>
               </a:rPr>
-              <a:t>1. Phased AON clock (Option B) kept freeze — paid off in clean bring-up.</a:t>
+              <a:t>1. Phased AON clock (Option B, decided 3/20) held freeze 4/10 — paid off in clean bring-up.</a:t>
             </a:r>
           </a:p>
           <a:p xmlns:a="http://schemas.openxmlformats.org/drawingml/2006/main">
@@ -2410,7 +2422,7 @@
                           <a:latin typeface="Calibri"/>
                           <a:ea typeface="Calibri"/>
                         </a:rPr>
-                        <a:t>2026-05-28</a:t>
+                        <a:t>2026-05-25</a:t>
                       </a:r>
                     </a:p>
                   </a:txBody>
@@ -2620,7 +2632,7 @@
                 <a:latin typeface="Calibri"/>
                 <a:ea typeface="Calibri"/>
               </a:rPr>
-              <a:t>By: 2026-05-22 steering.</a:t>
+              <a:t>By: 2026-05-22 steering (presentation date ~2026-05-16).</a:t>
             </a:r>
           </a:p>
           <a:p xmlns:a="http://schemas.openxmlformats.org/drawingml/2006/main">
@@ -2644,7 +2656,7 @@
                 <a:latin typeface="Calibri"/>
                 <a:ea typeface="Calibri"/>
               </a:rPr>
-              <a:t>No HC ask in this readout (see resource deck if sample surge).</a:t>
+              <a:t>No HC ask here (see resource deck if sample surge).</a:t>
             </a:r>
           </a:p>
         </p:txBody>

--- a/skills/presentations/assets/pptx/examples/02-results-demo.pptx
+++ b/skills/presentations/assets/pptx/examples/02-results-demo.pptx
@@ -5,16 +5,17 @@
     <p:sldMasterId xmlns:r="http://schemas.openxmlformats.org/officeDocument/2006/relationships" id="2147483648" r:id="rId1"/>
   </p:sldMasterIdLst>
   <p:notesMasterIdLst>
-    <p:notesMasterId r:id="R4224fa68b39e4517"/>
+    <p:notesMasterId r:id="R2c84bd74129b4663"/>
   </p:notesMasterIdLst>
   <p:sldIdLst>
-    <p:sldId id="256" r:id="R8730d3087adc42af"/>
-    <p:sldId id="257" r:id="Rb1642a00b74a483d"/>
-    <p:sldId id="258" r:id="Rb317d4b461f646a5"/>
-    <p:sldId id="259" r:id="Rebc9313b5b3a4f47"/>
-    <p:sldId id="260" r:id="R5019e48255ab45e9"/>
-    <p:sldId id="261" r:id="R88d315babf2c4312"/>
-    <p:sldId id="262" r:id="R15f21dcc5b7240fa"/>
+    <p:sldId id="256" r:id="R86ff761c138240fd"/>
+    <p:sldId id="257" r:id="Rd8a7e1b7ec0046cf"/>
+    <p:sldId id="258" r:id="Rc4267e39514d4d6f"/>
+    <p:sldId id="259" r:id="R87e51c6dbaef4526"/>
+    <p:sldId id="260" r:id="R17bf030451d740cf"/>
+    <p:sldId id="261" r:id="R5eea381c809f4bb8"/>
+    <p:sldId id="262" r:id="Rf294eb06b98a45c6"/>
+    <p:sldId id="263" r:id="R4882c2c5f3284a6b"/>
   </p:sldIdLst>
   <p:sldSz cx="12192000" cy="6858000"/>
   <p:notesSz cx="6858000" cy="9144000"/>
@@ -480,6 +481,30 @@
               <a:t>Cover (example). First silicon day-3 boot → ask for Tier-1 sample plan approval.</a:t>
             </a:r>
           </a:p>
+          <a:p xmlns:a="http://schemas.openxmlformats.org/drawingml/2006/main">
+            <a:r>
+              <a:rPr lang="en-US"/>
+              <a:t/>
+            </a:r>
+          </a:p>
+          <a:p xmlns:a="http://schemas.openxmlformats.org/drawingml/2006/main">
+            <a:r>
+              <a:rPr lang="en-US"/>
+              <a:t>Launch / silicon bring-up readout (impact first)</a:t>
+            </a:r>
+          </a:p>
+          <a:p xmlns:a="http://schemas.openxmlformats.org/drawingml/2006/main">
+            <a:r>
+              <a:rPr lang="en-US"/>
+              <a:t>MediaTek public 2nm tape-out milestone language: https://www.mediatek.com/press-room/mediatek-develops-chip-utilizing-tsmcs-2nm-process-achieving-milestones-in-performance-andpower-efficiency</a:t>
+            </a:r>
+          </a:p>
+          <a:p xmlns:a="http://schemas.openxmlformats.org/drawingml/2006/main">
+            <a:r>
+              <a:rPr lang="en-US"/>
+              <a:t>SRE Book — example postmortem impact summary shape: https://sre.google/sre-book/example-postmortem/</a:t>
+            </a:r>
+          </a:p>
         </p:txBody>
       </p:sp>
     </p:spTree>
@@ -532,7 +557,19 @@
           <a:p xmlns:a="http://schemas.openxmlformats.org/drawingml/2006/main">
             <a:r>
               <a:rPr lang="en-US"/>
-              <a:t>Celebrate briefly; land sample approval.</a:t>
+              <a:t>Launch / silicon bring-up readout (impact first)</a:t>
+            </a:r>
+          </a:p>
+          <a:p xmlns:a="http://schemas.openxmlformats.org/drawingml/2006/main">
+            <a:r>
+              <a:rPr lang="en-US"/>
+              <a:t>MediaTek public 2nm tape-out milestone language: https://www.mediatek.com/press-room/mediatek-develops-chip-utilizing-tsmcs-2nm-process-achieving-milestones-in-performance-andpower-efficiency</a:t>
+            </a:r>
+          </a:p>
+          <a:p xmlns:a="http://schemas.openxmlformats.org/drawingml/2006/main">
+            <a:r>
+              <a:rPr lang="en-US"/>
+              <a:t>SRE Book — example postmortem impact summary shape: https://sre.google/sre-book/example-postmortem/</a:t>
             </a:r>
           </a:p>
         </p:txBody>
@@ -587,7 +624,7 @@
           <a:p xmlns:a="http://schemas.openxmlformats.org/drawingml/2006/main">
             <a:r>
               <a:rPr lang="en-US"/>
-              <a:t>Same DoD as kickoff.</a:t>
+              <a:t>Celebrate briefly; land sample approval.</a:t>
             </a:r>
           </a:p>
         </p:txBody>
@@ -642,7 +679,7 @@
           <a:p xmlns:a="http://schemas.openxmlformats.org/drawingml/2006/main">
             <a:r>
               <a:rPr lang="en-US"/>
-              <a:t>Lead with boot and sample path.</a:t>
+              <a:t>Same DoD as kickoff.</a:t>
             </a:r>
           </a:p>
         </p:txBody>
@@ -697,7 +734,7 @@
           <a:p xmlns:a="http://schemas.openxmlformats.org/drawingml/2006/main">
             <a:r>
               <a:rPr lang="en-US"/>
-              <a:t>Connect back to prior decisions.</a:t>
+              <a:t>Lead with boot and sample path.</a:t>
             </a:r>
           </a:p>
         </p:txBody>
@@ -752,7 +789,7 @@
           <a:p xmlns:a="http://schemas.openxmlformats.org/drawingml/2006/main">
             <a:r>
               <a:rPr lang="en-US"/>
-              <a:t>Walk trade-offs; land recommendation.</a:t>
+              <a:t>Connect back to prior decisions.</a:t>
             </a:r>
           </a:p>
         </p:txBody>
@@ -766,6 +803,61 @@
 </file>
 
 <file path=ppt/notesSlides/notesSlide7.xml><?xml version="1.0" encoding="utf-8"?>
+<p:notes xmlns:p="http://schemas.openxmlformats.org/presentationml/2006/main">
+  <p:cSld>
+    <p:spTree>
+      <p:nvGrpSpPr>
+        <p:cNvPr id="1" name=""/>
+        <p:cNvGrpSpPr/>
+        <p:nvPr/>
+      </p:nvGrpSpPr>
+      <p:grpSpPr>
+        <a:xfrm xmlns:a="http://schemas.openxmlformats.org/drawingml/2006/main"/>
+      </p:grpSpPr>
+      <p:sp>
+        <p:nvSpPr>
+          <p:cNvPr id="2" name="Slide Image Placeholder 1"/>
+          <p:cNvSpPr/>
+          <p:nvPr>
+            <p:ph type="sldImg" idx="0"/>
+          </p:nvPr>
+        </p:nvSpPr>
+        <p:spPr/>
+        <p:txBody>
+          <a:bodyPr xmlns:a="http://schemas.openxmlformats.org/drawingml/2006/main"/>
+          <a:lstStyle xmlns:a="http://schemas.openxmlformats.org/drawingml/2006/main"/>
+          <a:p xmlns:a="http://schemas.openxmlformats.org/drawingml/2006/main"/>
+        </p:txBody>
+      </p:sp>
+      <p:sp>
+        <p:nvSpPr>
+          <p:cNvPr id="3" name="Notes Placeholder 2"/>
+          <p:cNvSpPr/>
+          <p:nvPr>
+            <p:ph type="body" idx="1"/>
+          </p:nvPr>
+        </p:nvSpPr>
+        <p:spPr/>
+        <p:txBody>
+          <a:bodyPr xmlns:a="http://schemas.openxmlformats.org/drawingml/2006/main"/>
+          <a:lstStyle xmlns:a="http://schemas.openxmlformats.org/drawingml/2006/main"/>
+          <a:p xmlns:a="http://schemas.openxmlformats.org/drawingml/2006/main">
+            <a:r>
+              <a:rPr lang="en-US"/>
+              <a:t>Walk trade-offs; land recommendation.</a:t>
+            </a:r>
+          </a:p>
+        </p:txBody>
+      </p:sp>
+    </p:spTree>
+  </p:cSld>
+  <p:clrMapOvr>
+    <a:masterClrMapping xmlns:a="http://schemas.openxmlformats.org/drawingml/2006/main"/>
+  </p:clrMapOvr>
+</p:notes>
+</file>
+
+<file path=ppt/notesSlides/notesSlide8.xml><?xml version="1.0" encoding="utf-8"?>
 <p:notes xmlns:p="http://schemas.openxmlformats.org/presentationml/2006/main">
   <p:cSld>
     <p:spTree>
@@ -1135,8 +1227,8 @@
         </p:nvSpPr>
         <p:spPr>
           <a:xfrm xmlns:a="http://schemas.openxmlformats.org/drawingml/2006/main">
-            <a:off x="504000" y="1008000"/>
-            <a:ext cx="11088000" cy="324000"/>
+            <a:off x="504000" y="936000"/>
+            <a:ext cx="11088000" cy="306000"/>
           </a:xfrm>
           <a:prstGeom xmlns:a="http://schemas.openxmlformats.org/drawingml/2006/main" prst="rect">
             <a:avLst/>
@@ -1167,8 +1259,8 @@
         </p:nvSpPr>
         <p:spPr>
           <a:xfrm xmlns:a="http://schemas.openxmlformats.org/drawingml/2006/main">
-            <a:off x="504000" y="1440000"/>
-            <a:ext cx="11088000" cy="936000"/>
+            <a:off x="504000" y="1332000"/>
+            <a:ext cx="11088000" cy="900000"/>
           </a:xfrm>
           <a:prstGeom xmlns:a="http://schemas.openxmlformats.org/drawingml/2006/main" prst="rect">
             <a:avLst/>
@@ -1179,7 +1271,7 @@
           <a:lstStyle xmlns:a="http://schemas.openxmlformats.org/drawingml/2006/main"/>
           <a:p xmlns:a="http://schemas.openxmlformats.org/drawingml/2006/main">
             <a:r>
-              <a:rPr lang="en-US" sz="3400" b="1">
+              <a:rPr lang="en-US" sz="3200" b="1">
                 <a:solidFill>
                   <a:srgbClr val="FFFFFF"/>
                 </a:solidFill>
@@ -1199,8 +1291,8 @@
         </p:nvSpPr>
         <p:spPr>
           <a:xfrm xmlns:a="http://schemas.openxmlformats.org/drawingml/2006/main">
-            <a:off x="504000" y="2520000"/>
-            <a:ext cx="11088000" cy="720000"/>
+            <a:off x="504000" y="2340000"/>
+            <a:ext cx="11088000" cy="648000"/>
           </a:xfrm>
           <a:prstGeom xmlns:a="http://schemas.openxmlformats.org/drawingml/2006/main" prst="rect">
             <a:avLst/>
@@ -1211,7 +1303,7 @@
           <a:lstStyle xmlns:a="http://schemas.openxmlformats.org/drawingml/2006/main"/>
           <a:p xmlns:a="http://schemas.openxmlformats.org/drawingml/2006/main">
             <a:r>
-              <a:rPr lang="en-US" sz="1700" b="0">
+              <a:rPr lang="en-US" sz="1600" b="0">
                 <a:solidFill>
                   <a:srgbClr val="CADCFC"/>
                 </a:solidFill>
@@ -1226,6 +1318,38 @@
       <p:sp>
         <p:nvSpPr>
           <p:cNvPr id="100003" name="TextBox 4"/>
+          <p:cNvSpPr txBox="1"/>
+          <p:nvPr/>
+        </p:nvSpPr>
+        <p:spPr>
+          <a:xfrm xmlns:a="http://schemas.openxmlformats.org/drawingml/2006/main">
+            <a:off x="504000" y="3240000"/>
+            <a:ext cx="11088000" cy="576000"/>
+          </a:xfrm>
+          <a:prstGeom xmlns:a="http://schemas.openxmlformats.org/drawingml/2006/main" prst="rect">
+            <a:avLst/>
+          </a:prstGeom>
+        </p:spPr>
+        <p:txBody>
+          <a:bodyPr xmlns:a="http://schemas.openxmlformats.org/drawingml/2006/main"/>
+          <a:lstStyle xmlns:a="http://schemas.openxmlformats.org/drawingml/2006/main"/>
+          <a:p xmlns:a="http://schemas.openxmlformats.org/drawingml/2006/main">
+            <a:r>
+              <a:rPr lang="en-US" sz="1400" b="0">
+                <a:solidFill>
+                  <a:srgbClr val="A0C4E8"/>
+                </a:solidFill>
+                <a:latin typeface="Calibri"/>
+                <a:ea typeface="Calibri"/>
+              </a:rPr>
+              <a:t>Pattern: Launch / silicon bring-up readout (impact first)</a:t>
+            </a:r>
+          </a:p>
+        </p:txBody>
+      </p:sp>
+      <p:sp>
+        <p:nvSpPr>
+          <p:cNvPr id="100004" name="TextBox 5"/>
           <p:cNvSpPr txBox="1"/>
           <p:nvPr/>
         </p:nvSpPr>
@@ -1261,6 +1385,279 @@
 </file>
 
 <file path=ppt/slides/slide2.xml><?xml version="1.0" encoding="utf-8"?>
+<p:sld xmlns:p="http://schemas.openxmlformats.org/presentationml/2006/main">
+  <p:cSld name="Pattern provenance">
+    <p:bg>
+      <p:bgPr>
+        <a:solidFill xmlns:a="http://schemas.openxmlformats.org/drawingml/2006/main">
+          <a:srgbClr val="F4F7FC"/>
+        </a:solidFill>
+      </p:bgPr>
+    </p:bg>
+    <p:spTree>
+      <p:nvGrpSpPr>
+        <p:cNvPr id="1" name=""/>
+        <p:cNvGrpSpPr/>
+        <p:nvPr/>
+      </p:nvGrpSpPr>
+      <p:grpSpPr/>
+      <p:sp>
+        <p:nvSpPr>
+          <p:cNvPr id="100005" name="TextBox 1"/>
+          <p:cNvSpPr txBox="1"/>
+          <p:nvPr/>
+        </p:nvSpPr>
+        <p:spPr>
+          <a:xfrm xmlns:a="http://schemas.openxmlformats.org/drawingml/2006/main">
+            <a:off x="504000" y="270000"/>
+            <a:ext cx="11088000" cy="270000"/>
+          </a:xfrm>
+          <a:prstGeom xmlns:a="http://schemas.openxmlformats.org/drawingml/2006/main" prst="rect">
+            <a:avLst/>
+          </a:prstGeom>
+        </p:spPr>
+        <p:txBody>
+          <a:bodyPr xmlns:a="http://schemas.openxmlformats.org/drawingml/2006/main"/>
+          <a:lstStyle xmlns:a="http://schemas.openxmlformats.org/drawingml/2006/main"/>
+          <a:p xmlns:a="http://schemas.openxmlformats.org/drawingml/2006/main">
+            <a:r>
+              <a:rPr lang="en-US" sz="1100" b="1">
+                <a:solidFill>
+                  <a:srgbClr val="2B6CB0"/>
+                </a:solidFill>
+                <a:latin typeface="Calibri"/>
+                <a:ea typeface="Calibri"/>
+              </a:rPr>
+              <a:t>WHERE THIS DECK SHAPE COMES FROM</a:t>
+            </a:r>
+          </a:p>
+        </p:txBody>
+      </p:sp>
+      <p:sp>
+        <p:nvSpPr>
+          <p:cNvPr id="100006" name="TextBox 2"/>
+          <p:cNvSpPr txBox="1"/>
+          <p:nvPr/>
+        </p:nvSpPr>
+        <p:spPr>
+          <a:xfrm xmlns:a="http://schemas.openxmlformats.org/drawingml/2006/main">
+            <a:off x="504000" y="558000"/>
+            <a:ext cx="11088000" cy="612000"/>
+          </a:xfrm>
+          <a:prstGeom xmlns:a="http://schemas.openxmlformats.org/drawingml/2006/main" prst="rect">
+            <a:avLst/>
+          </a:prstGeom>
+        </p:spPr>
+        <p:txBody>
+          <a:bodyPr xmlns:a="http://schemas.openxmlformats.org/drawingml/2006/main"/>
+          <a:lstStyle xmlns:a="http://schemas.openxmlformats.org/drawingml/2006/main"/>
+          <a:p xmlns:a="http://schemas.openxmlformats.org/drawingml/2006/main">
+            <a:r>
+              <a:rPr lang="en-US" sz="2800" b="1">
+                <a:solidFill>
+                  <a:srgbClr val="1A202C"/>
+                </a:solidFill>
+                <a:latin typeface="Calibri"/>
+                <a:ea typeface="Calibri"/>
+              </a:rPr>
+              <a:t>Pattern provenance</a:t>
+            </a:r>
+          </a:p>
+        </p:txBody>
+      </p:sp>
+      <p:sp>
+        <p:nvSpPr>
+          <p:cNvPr id="100007" name="TextBox 3"/>
+          <p:cNvSpPr txBox="1"/>
+          <p:nvPr/>
+        </p:nvSpPr>
+        <p:spPr>
+          <a:xfrm xmlns:a="http://schemas.openxmlformats.org/drawingml/2006/main">
+            <a:off x="504000" y="1260000"/>
+            <a:ext cx="11088000" cy="4860000"/>
+          </a:xfrm>
+          <a:prstGeom xmlns:a="http://schemas.openxmlformats.org/drawingml/2006/main" prst="rect">
+            <a:avLst/>
+          </a:prstGeom>
+          <a:solidFill xmlns:a="http://schemas.openxmlformats.org/drawingml/2006/main">
+            <a:srgbClr val="FFFFFF"/>
+          </a:solidFill>
+        </p:spPr>
+        <p:txBody>
+          <a:bodyPr xmlns:a="http://schemas.openxmlformats.org/drawingml/2006/main"/>
+          <a:lstStyle xmlns:a="http://schemas.openxmlformats.org/drawingml/2006/main"/>
+          <a:p xmlns:a="http://schemas.openxmlformats.org/drawingml/2006/main">
+            <a:r>
+              <a:rPr lang="en-US" sz="1500" b="0">
+                <a:solidFill>
+                  <a:srgbClr val="1A202C"/>
+                </a:solidFill>
+                <a:latin typeface="Calibri"/>
+                <a:ea typeface="Calibri"/>
+              </a:rPr>
+              <a:t>Public pattern (structure only — not a confidential company deck):</a:t>
+            </a:r>
+          </a:p>
+          <a:p xmlns:a="http://schemas.openxmlformats.org/drawingml/2006/main">
+            <a:r>
+              <a:rPr lang="en-US" sz="1500" b="0">
+                <a:solidFill>
+                  <a:srgbClr val="1A202C"/>
+                </a:solidFill>
+                <a:latin typeface="Calibri"/>
+                <a:ea typeface="Calibri"/>
+              </a:rPr>
+              <a:t/>
+            </a:r>
+          </a:p>
+          <a:p xmlns:a="http://schemas.openxmlformats.org/drawingml/2006/main">
+            <a:r>
+              <a:rPr lang="en-US" sz="1500" b="0">
+                <a:solidFill>
+                  <a:srgbClr val="1A202C"/>
+                </a:solidFill>
+                <a:latin typeface="Calibri"/>
+                <a:ea typeface="Calibri"/>
+              </a:rPr>
+              <a:t>Launch / silicon bring-up readout (impact first)</a:t>
+            </a:r>
+          </a:p>
+          <a:p xmlns:a="http://schemas.openxmlformats.org/drawingml/2006/main">
+            <a:r>
+              <a:rPr lang="en-US" sz="1500" b="0">
+                <a:solidFill>
+                  <a:srgbClr val="1A202C"/>
+                </a:solidFill>
+                <a:latin typeface="Calibri"/>
+                <a:ea typeface="Calibri"/>
+              </a:rPr>
+              <a:t/>
+            </a:r>
+          </a:p>
+          <a:p xmlns:a="http://schemas.openxmlformats.org/drawingml/2006/main">
+            <a:r>
+              <a:rPr lang="en-US" sz="1500" b="0">
+                <a:solidFill>
+                  <a:srgbClr val="1A202C"/>
+                </a:solidFill>
+                <a:latin typeface="Calibri"/>
+                <a:ea typeface="Calibri"/>
+              </a:rPr>
+              <a:t>• MediaTek public 2nm tape-out milestone language</a:t>
+            </a:r>
+          </a:p>
+          <a:p xmlns:a="http://schemas.openxmlformats.org/drawingml/2006/main">
+            <a:r>
+              <a:rPr lang="en-US" sz="1500" b="0">
+                <a:solidFill>
+                  <a:srgbClr val="1A202C"/>
+                </a:solidFill>
+                <a:latin typeface="Calibri"/>
+                <a:ea typeface="Calibri"/>
+              </a:rPr>
+              <a:t>  https://www.mediatek.com/press-room/mediatek-develops-chip-utilizing-tsmcs-2nm-process-achieving-milestones-in-performance-andpower-efficiency</a:t>
+            </a:r>
+          </a:p>
+          <a:p xmlns:a="http://schemas.openxmlformats.org/drawingml/2006/main">
+            <a:r>
+              <a:rPr lang="en-US" sz="1500" b="0">
+                <a:solidFill>
+                  <a:srgbClr val="1A202C"/>
+                </a:solidFill>
+                <a:latin typeface="Calibri"/>
+                <a:ea typeface="Calibri"/>
+              </a:rPr>
+              <a:t>• SRE Book — example postmortem impact summary shape</a:t>
+            </a:r>
+          </a:p>
+          <a:p xmlns:a="http://schemas.openxmlformats.org/drawingml/2006/main">
+            <a:r>
+              <a:rPr lang="en-US" sz="1500" b="0">
+                <a:solidFill>
+                  <a:srgbClr val="1A202C"/>
+                </a:solidFill>
+                <a:latin typeface="Calibri"/>
+                <a:ea typeface="Calibri"/>
+              </a:rPr>
+              <a:t>  https://sre.google/sre-book/example-postmortem/</a:t>
+            </a:r>
+          </a:p>
+          <a:p xmlns:a="http://schemas.openxmlformats.org/drawingml/2006/main">
+            <a:r>
+              <a:rPr lang="en-US" sz="1500" b="0">
+                <a:solidFill>
+                  <a:srgbClr val="1A202C"/>
+                </a:solidFill>
+                <a:latin typeface="Calibri"/>
+                <a:ea typeface="Calibri"/>
+              </a:rPr>
+              <a:t/>
+            </a:r>
+          </a:p>
+          <a:p xmlns:a="http://schemas.openxmlformats.org/drawingml/2006/main">
+            <a:r>
+              <a:rPr lang="en-US" sz="1500" b="0">
+                <a:solidFill>
+                  <a:srgbClr val="1A202C"/>
+                </a:solidFill>
+                <a:latin typeface="Calibri"/>
+                <a:ea typeface="Calibri"/>
+              </a:rPr>
+              <a:t>How to use: copy section order and decision verbs; replace with your metrics.</a:t>
+            </a:r>
+          </a:p>
+          <a:p xmlns:a="http://schemas.openxmlformats.org/drawingml/2006/main">
+            <a:r>
+              <a:rPr lang="en-US" sz="1500" b="0">
+                <a:solidFill>
+                  <a:srgbClr val="1A202C"/>
+                </a:solidFill>
+                <a:latin typeface="Calibri"/>
+                <a:ea typeface="Calibri"/>
+              </a:rPr>
+              <a:t>In-repo: skills/presentations/classic-public-cases.md</a:t>
+            </a:r>
+          </a:p>
+        </p:txBody>
+      </p:sp>
+      <p:sp>
+        <p:nvSpPr>
+          <p:cNvPr id="100008" name="TextBox 4"/>
+          <p:cNvSpPr txBox="1"/>
+          <p:nvPr/>
+        </p:nvSpPr>
+        <p:spPr>
+          <a:xfrm xmlns:a="http://schemas.openxmlformats.org/drawingml/2006/main">
+            <a:off x="504000" y="6426000"/>
+            <a:ext cx="11088000" cy="306000"/>
+          </a:xfrm>
+          <a:prstGeom xmlns:a="http://schemas.openxmlformats.org/drawingml/2006/main" prst="rect">
+            <a:avLst/>
+          </a:prstGeom>
+        </p:spPr>
+        <p:txBody>
+          <a:bodyPr xmlns:a="http://schemas.openxmlformats.org/drawingml/2006/main"/>
+          <a:lstStyle xmlns:a="http://schemas.openxmlformats.org/drawingml/2006/main"/>
+          <a:p xmlns:a="http://schemas.openxmlformats.org/drawingml/2006/main">
+            <a:r>
+              <a:rPr lang="en-US" sz="1100" b="0">
+                <a:solidFill>
+                  <a:srgbClr val="718096"/>
+                </a:solidFill>
+                <a:latin typeface="Calibri"/>
+                <a:ea typeface="Calibri"/>
+              </a:rPr>
+              <a:t>Atlas Platform  ·  Project Aurora  ·  NovaSemi  ·  2026</a:t>
+            </a:r>
+          </a:p>
+        </p:txBody>
+      </p:sp>
+    </p:spTree>
+  </p:cSld>
+</p:sld>
+</file>
+
+<file path=ppt/slides/slide3.xml><?xml version="1.0" encoding="utf-8"?>
 <p:sld xmlns:p="http://schemas.openxmlformats.org/presentationml/2006/main">
   <p:cSld name="BLUF — first silicon green on critical path">
     <p:bg>
@@ -1279,7 +1676,7 @@
       <p:grpSpPr/>
       <p:sp>
         <p:nvSpPr>
-          <p:cNvPr id="100004" name="TextBox 1"/>
+          <p:cNvPr id="100009" name="TextBox 1"/>
           <p:cNvSpPr txBox="1"/>
           <p:nvPr/>
         </p:nvSpPr>
@@ -1311,7 +1708,7 @@
       </p:sp>
       <p:sp>
         <p:nvSpPr>
-          <p:cNvPr id="100005" name="TextBox 2"/>
+          <p:cNvPr id="100010" name="TextBox 2"/>
           <p:cNvSpPr txBox="1"/>
           <p:nvPr/>
         </p:nvSpPr>
@@ -1343,7 +1740,7 @@
       </p:sp>
       <p:sp>
         <p:nvSpPr>
-          <p:cNvPr id="100006" name="TextBox 3"/>
+          <p:cNvPr id="100011" name="TextBox 3"/>
           <p:cNvSpPr txBox="1"/>
           <p:nvPr/>
         </p:nvSpPr>
@@ -1378,7 +1775,7 @@
       </p:sp>
       <p:sp>
         <p:nvSpPr>
-          <p:cNvPr id="100007" name="TextBox 4"/>
+          <p:cNvPr id="100012" name="TextBox 4"/>
           <p:cNvSpPr txBox="1"/>
           <p:nvPr/>
         </p:nvSpPr>
@@ -1473,7 +1870,7 @@
       </p:sp>
       <p:sp>
         <p:nvSpPr>
-          <p:cNvPr id="100008" name="TextBox 5"/>
+          <p:cNvPr id="100013" name="TextBox 5"/>
           <p:cNvSpPr txBox="1"/>
           <p:nvPr/>
         </p:nvSpPr>
@@ -1508,7 +1905,7 @@
 </p:sld>
 </file>
 
-<file path=ppt/slides/slide3.xml><?xml version="1.0" encoding="utf-8"?>
+<file path=ppt/slides/slide4.xml><?xml version="1.0" encoding="utf-8"?>
 <p:sld xmlns:p="http://schemas.openxmlformats.org/presentationml/2006/main">
   <p:cSld name="Goal recall (period start)">
     <p:bg>
@@ -1527,7 +1924,7 @@
       <p:grpSpPr/>
       <p:sp>
         <p:nvSpPr>
-          <p:cNvPr id="100009" name="TextBox 1"/>
+          <p:cNvPr id="100014" name="TextBox 1"/>
           <p:cNvSpPr txBox="1"/>
           <p:nvPr/>
         </p:nvSpPr>
@@ -1559,7 +1956,7 @@
       </p:sp>
       <p:sp>
         <p:nvSpPr>
-          <p:cNvPr id="100010" name="TextBox 2"/>
+          <p:cNvPr id="100015" name="TextBox 2"/>
           <p:cNvSpPr txBox="1"/>
           <p:nvPr/>
         </p:nvSpPr>
@@ -1618,7 +2015,7 @@
       </p:sp>
       <p:sp>
         <p:nvSpPr>
-          <p:cNvPr id="100011" name="TextBox 3"/>
+          <p:cNvPr id="100016" name="TextBox 3"/>
           <p:cNvSpPr txBox="1"/>
           <p:nvPr/>
         </p:nvSpPr>
@@ -1653,7 +2050,7 @@
 </p:sld>
 </file>
 
-<file path=ppt/slides/slide4.xml><?xml version="1.0" encoding="utf-8"?>
+<file path=ppt/slides/slide5.xml><?xml version="1.0" encoding="utf-8"?>
 <p:sld xmlns:p="http://schemas.openxmlformats.org/presentationml/2006/main">
   <p:cSld name="Outcome metrics">
     <p:bg>
@@ -1672,7 +2069,7 @@
       <p:grpSpPr/>
       <p:sp>
         <p:nvSpPr>
-          <p:cNvPr id="100012" name="TextBox 1"/>
+          <p:cNvPr id="100017" name="TextBox 1"/>
           <p:cNvSpPr txBox="1"/>
           <p:nvPr/>
         </p:nvSpPr>
@@ -1704,7 +2101,7 @@
       </p:sp>
       <p:sp>
         <p:nvSpPr>
-          <p:cNvPr id="100013" name="TextBox 2"/>
+          <p:cNvPr id="100018" name="TextBox 2"/>
           <p:cNvSpPr txBox="1"/>
           <p:nvPr/>
         </p:nvSpPr>
@@ -1775,7 +2172,7 @@
       </p:sp>
       <p:sp>
         <p:nvSpPr>
-          <p:cNvPr id="100014" name="TextBox 3"/>
+          <p:cNvPr id="100019" name="TextBox 3"/>
           <p:cNvSpPr txBox="1"/>
           <p:nvPr/>
         </p:nvSpPr>
@@ -1810,7 +2207,7 @@
 </p:sld>
 </file>
 
-<file path=ppt/slides/slide5.xml><?xml version="1.0" encoding="utf-8"?>
+<file path=ppt/slides/slide6.xml><?xml version="1.0" encoding="utf-8"?>
 <p:sld xmlns:p="http://schemas.openxmlformats.org/presentationml/2006/main">
   <p:cSld name="How we got here + learnings">
     <p:bg>
@@ -1829,7 +2226,7 @@
       <p:grpSpPr/>
       <p:sp>
         <p:nvSpPr>
-          <p:cNvPr id="100015" name="TextBox 1"/>
+          <p:cNvPr id="100020" name="TextBox 1"/>
           <p:cNvSpPr txBox="1"/>
           <p:nvPr/>
         </p:nvSpPr>
@@ -1861,7 +2258,7 @@
       </p:sp>
       <p:sp>
         <p:nvSpPr>
-          <p:cNvPr id="100016" name="TextBox 2"/>
+          <p:cNvPr id="100021" name="TextBox 2"/>
           <p:cNvSpPr txBox="1"/>
           <p:nvPr/>
         </p:nvSpPr>
@@ -1944,7 +2341,7 @@
       </p:sp>
       <p:sp>
         <p:nvSpPr>
-          <p:cNvPr id="100017" name="TextBox 3"/>
+          <p:cNvPr id="100022" name="TextBox 3"/>
           <p:cNvSpPr txBox="1"/>
           <p:nvPr/>
         </p:nvSpPr>
@@ -1979,7 +2376,7 @@
 </p:sld>
 </file>
 
-<file path=ppt/slides/slide6.xml><?xml version="1.0" encoding="utf-8"?>
+<file path=ppt/slides/slide7.xml><?xml version="1.0" encoding="utf-8"?>
 <p:sld xmlns:p="http://schemas.openxmlformats.org/presentationml/2006/main">
   <p:cSld name="Options &amp; recommendation">
     <p:bg>
@@ -1998,7 +2395,7 @@
       <p:grpSpPr/>
       <p:sp>
         <p:nvSpPr>
-          <p:cNvPr id="100018" name="TextBox 1"/>
+          <p:cNvPr id="100023" name="TextBox 1"/>
           <p:cNvSpPr txBox="1"/>
           <p:nvPr/>
         </p:nvSpPr>
@@ -2030,7 +2427,7 @@
       </p:sp>
       <p:sp>
         <p:nvSpPr>
-          <p:cNvPr id="100019" name="TextBox 2"/>
+          <p:cNvPr id="100024" name="TextBox 2"/>
           <p:cNvSpPr txBox="1"/>
           <p:nvPr/>
         </p:nvSpPr>
@@ -2062,7 +2459,7 @@
       </p:sp>
       <p:graphicFrame>
         <p:nvGraphicFramePr>
-          <p:cNvPr id="100020" name="Table 1"/>
+          <p:cNvPr id="100025" name="Table 1"/>
           <p:cNvGraphicFramePr/>
           <p:nvPr/>
         </p:nvGraphicFramePr>
@@ -2462,7 +2859,7 @@
       </p:graphicFrame>
       <p:sp>
         <p:nvSpPr>
-          <p:cNvPr id="100021" name="TextBox 3"/>
+          <p:cNvPr id="100026" name="TextBox 3"/>
           <p:cNvSpPr txBox="1"/>
           <p:nvPr/>
         </p:nvSpPr>
@@ -2497,7 +2894,7 @@
 </p:sld>
 </file>
 
-<file path=ppt/slides/slide7.xml><?xml version="1.0" encoding="utf-8"?>
+<file path=ppt/slides/slide8.xml><?xml version="1.0" encoding="utf-8"?>
 <p:sld xmlns:p="http://schemas.openxmlformats.org/presentationml/2006/main">
   <p:cSld name="Decision &amp; ask">
     <p:bg>
@@ -2516,7 +2913,7 @@
       <p:grpSpPr/>
       <p:sp>
         <p:nvSpPr>
-          <p:cNvPr id="100022" name="TextBox 1"/>
+          <p:cNvPr id="100027" name="TextBox 1"/>
           <p:cNvSpPr txBox="1"/>
           <p:nvPr/>
         </p:nvSpPr>
@@ -2548,7 +2945,7 @@
       </p:sp>
       <p:sp>
         <p:nvSpPr>
-          <p:cNvPr id="100023" name="TextBox 2"/>
+          <p:cNvPr id="100028" name="TextBox 2"/>
           <p:cNvSpPr txBox="1"/>
           <p:nvPr/>
         </p:nvSpPr>
@@ -2580,7 +2977,7 @@
       </p:sp>
       <p:sp>
         <p:nvSpPr>
-          <p:cNvPr id="100024" name="TextBox 3"/>
+          <p:cNvPr id="100029" name="TextBox 3"/>
           <p:cNvSpPr txBox="1"/>
           <p:nvPr/>
         </p:nvSpPr>
@@ -2663,7 +3060,7 @@
       </p:sp>
       <p:sp>
         <p:nvSpPr>
-          <p:cNvPr id="100025" name="TextBox 4"/>
+          <p:cNvPr id="100030" name="TextBox 4"/>
           <p:cNvSpPr txBox="1"/>
           <p:nvPr/>
         </p:nvSpPr>

--- a/skills/presentations/assets/pptx/examples/02-results-demo.pptx
+++ b/skills/presentations/assets/pptx/examples/02-results-demo.pptx
@@ -5,17 +5,18 @@
     <p:sldMasterId xmlns:r="http://schemas.openxmlformats.org/officeDocument/2006/relationships" id="2147483648" r:id="rId1"/>
   </p:sldMasterIdLst>
   <p:notesMasterIdLst>
-    <p:notesMasterId r:id="R2c84bd74129b4663"/>
+    <p:notesMasterId r:id="Rd5a4814f5eff4473"/>
   </p:notesMasterIdLst>
   <p:sldIdLst>
-    <p:sldId id="256" r:id="R86ff761c138240fd"/>
-    <p:sldId id="257" r:id="Rd8a7e1b7ec0046cf"/>
-    <p:sldId id="258" r:id="Rc4267e39514d4d6f"/>
-    <p:sldId id="259" r:id="R87e51c6dbaef4526"/>
-    <p:sldId id="260" r:id="R17bf030451d740cf"/>
-    <p:sldId id="261" r:id="R5eea381c809f4bb8"/>
-    <p:sldId id="262" r:id="Rf294eb06b98a45c6"/>
-    <p:sldId id="263" r:id="R4882c2c5f3284a6b"/>
+    <p:sldId id="256" r:id="R5c95986e3e8a4dc9"/>
+    <p:sldId id="257" r:id="R0368bf4f75404c8a"/>
+    <p:sldId id="258" r:id="R2dd9edbfc48149c1"/>
+    <p:sldId id="259" r:id="R38a2c70459d6401f"/>
+    <p:sldId id="260" r:id="R4f99bf01a71241e4"/>
+    <p:sldId id="261" r:id="Rd36157b6ebdb4fc6"/>
+    <p:sldId id="262" r:id="Rc9baf2b89b344868"/>
+    <p:sldId id="263" r:id="R8b60cff412b34854"/>
+    <p:sldId id="264" r:id="R18e3919b7bf641fc"/>
   </p:sldIdLst>
   <p:sldSz cx="12192000" cy="6858000"/>
   <p:notesSz cx="6858000" cy="9144000"/>
@@ -624,7 +625,7 @@
           <a:p xmlns:a="http://schemas.openxmlformats.org/drawingml/2006/main">
             <a:r>
               <a:rPr lang="en-US"/>
-              <a:t>Celebrate briefly; land sample approval.</a:t>
+              <a:t>Agent/human: answer who/stakes/decision from this slide alone. Recommend=YES — approve sample plan; keep USB3 as parallel non-blocking work. by 2026-05-22 steering.</a:t>
             </a:r>
           </a:p>
         </p:txBody>
@@ -679,7 +680,7 @@
           <a:p xmlns:a="http://schemas.openxmlformats.org/drawingml/2006/main">
             <a:r>
               <a:rPr lang="en-US"/>
-              <a:t>Same DoD as kickoff.</a:t>
+              <a:t>Celebrate briefly; land sample approval.</a:t>
             </a:r>
           </a:p>
         </p:txBody>
@@ -734,7 +735,7 @@
           <a:p xmlns:a="http://schemas.openxmlformats.org/drawingml/2006/main">
             <a:r>
               <a:rPr lang="en-US"/>
-              <a:t>Lead with boot and sample path.</a:t>
+              <a:t>Same DoD as kickoff.</a:t>
             </a:r>
           </a:p>
         </p:txBody>
@@ -789,7 +790,7 @@
           <a:p xmlns:a="http://schemas.openxmlformats.org/drawingml/2006/main">
             <a:r>
               <a:rPr lang="en-US"/>
-              <a:t>Connect back to prior decisions.</a:t>
+              <a:t>Lead with boot and sample path.</a:t>
             </a:r>
           </a:p>
         </p:txBody>
@@ -844,7 +845,7 @@
           <a:p xmlns:a="http://schemas.openxmlformats.org/drawingml/2006/main">
             <a:r>
               <a:rPr lang="en-US"/>
-              <a:t>Walk trade-offs; land recommendation.</a:t>
+              <a:t>Connect back to prior decisions.</a:t>
             </a:r>
           </a:p>
         </p:txBody>
@@ -858,6 +859,61 @@
 </file>
 
 <file path=ppt/notesSlides/notesSlide8.xml><?xml version="1.0" encoding="utf-8"?>
+<p:notes xmlns:p="http://schemas.openxmlformats.org/presentationml/2006/main">
+  <p:cSld>
+    <p:spTree>
+      <p:nvGrpSpPr>
+        <p:cNvPr id="1" name=""/>
+        <p:cNvGrpSpPr/>
+        <p:nvPr/>
+      </p:nvGrpSpPr>
+      <p:grpSpPr>
+        <a:xfrm xmlns:a="http://schemas.openxmlformats.org/drawingml/2006/main"/>
+      </p:grpSpPr>
+      <p:sp>
+        <p:nvSpPr>
+          <p:cNvPr id="2" name="Slide Image Placeholder 1"/>
+          <p:cNvSpPr/>
+          <p:nvPr>
+            <p:ph type="sldImg" idx="0"/>
+          </p:nvPr>
+        </p:nvSpPr>
+        <p:spPr/>
+        <p:txBody>
+          <a:bodyPr xmlns:a="http://schemas.openxmlformats.org/drawingml/2006/main"/>
+          <a:lstStyle xmlns:a="http://schemas.openxmlformats.org/drawingml/2006/main"/>
+          <a:p xmlns:a="http://schemas.openxmlformats.org/drawingml/2006/main"/>
+        </p:txBody>
+      </p:sp>
+      <p:sp>
+        <p:nvSpPr>
+          <p:cNvPr id="3" name="Notes Placeholder 2"/>
+          <p:cNvSpPr/>
+          <p:nvPr>
+            <p:ph type="body" idx="1"/>
+          </p:nvPr>
+        </p:nvSpPr>
+        <p:spPr/>
+        <p:txBody>
+          <a:bodyPr xmlns:a="http://schemas.openxmlformats.org/drawingml/2006/main"/>
+          <a:lstStyle xmlns:a="http://schemas.openxmlformats.org/drawingml/2006/main"/>
+          <a:p xmlns:a="http://schemas.openxmlformats.org/drawingml/2006/main">
+            <a:r>
+              <a:rPr lang="en-US"/>
+              <a:t>Walk trade-offs; land recommendation.</a:t>
+            </a:r>
+          </a:p>
+        </p:txBody>
+      </p:sp>
+    </p:spTree>
+  </p:cSld>
+  <p:clrMapOvr>
+    <a:masterClrMapping xmlns:a="http://schemas.openxmlformats.org/drawingml/2006/main"/>
+  </p:clrMapOvr>
+</p:notes>
+</file>
+
+<file path=ppt/notesSlides/notesSlide9.xml><?xml version="1.0" encoding="utf-8"?>
 <p:notes xmlns:p="http://schemas.openxmlformats.org/presentationml/2006/main">
   <p:cSld>
     <p:spTree>
@@ -1659,6 +1715,387 @@
 
 <file path=ppt/slides/slide3.xml><?xml version="1.0" encoding="utf-8"?>
 <p:sld xmlns:p="http://schemas.openxmlformats.org/presentationml/2006/main">
+  <p:cSld name="Situation &amp; decision card">
+    <p:bg>
+      <p:bgPr>
+        <a:solidFill xmlns:a="http://schemas.openxmlformats.org/drawingml/2006/main">
+          <a:srgbClr val="F4F7FC"/>
+        </a:solidFill>
+      </p:bgPr>
+    </p:bg>
+    <p:spTree>
+      <p:nvGrpSpPr>
+        <p:cNvPr id="1" name=""/>
+        <p:cNvGrpSpPr/>
+        <p:nvPr/>
+      </p:nvGrpSpPr>
+      <p:grpSpPr/>
+      <p:sp>
+        <p:nvSpPr>
+          <p:cNvPr id="100009" name="TextBox 1"/>
+          <p:cNvSpPr txBox="1"/>
+          <p:nvPr/>
+        </p:nvSpPr>
+        <p:spPr>
+          <a:xfrm xmlns:a="http://schemas.openxmlformats.org/drawingml/2006/main">
+            <a:off x="504000" y="270000"/>
+            <a:ext cx="11088000" cy="270000"/>
+          </a:xfrm>
+          <a:prstGeom xmlns:a="http://schemas.openxmlformats.org/drawingml/2006/main" prst="rect">
+            <a:avLst/>
+          </a:prstGeom>
+        </p:spPr>
+        <p:txBody>
+          <a:bodyPr xmlns:a="http://schemas.openxmlformats.org/drawingml/2006/main"/>
+          <a:lstStyle xmlns:a="http://schemas.openxmlformats.org/drawingml/2006/main"/>
+          <a:p xmlns:a="http://schemas.openxmlformats.org/drawingml/2006/main">
+            <a:r>
+              <a:rPr lang="en-US" sz="1100" b="1">
+                <a:solidFill>
+                  <a:srgbClr val="2B6CB0"/>
+                </a:solidFill>
+                <a:latin typeface="Calibri"/>
+                <a:ea typeface="Calibri"/>
+              </a:rPr>
+              <a:t>READ THIS BEFORE THE DETAILS</a:t>
+            </a:r>
+          </a:p>
+        </p:txBody>
+      </p:sp>
+      <p:sp>
+        <p:nvSpPr>
+          <p:cNvPr id="100010" name="TextBox 2"/>
+          <p:cNvSpPr txBox="1"/>
+          <p:nvPr/>
+        </p:nvSpPr>
+        <p:spPr>
+          <a:xfrm xmlns:a="http://schemas.openxmlformats.org/drawingml/2006/main">
+            <a:off x="504000" y="558000"/>
+            <a:ext cx="11088000" cy="612000"/>
+          </a:xfrm>
+          <a:prstGeom xmlns:a="http://schemas.openxmlformats.org/drawingml/2006/main" prst="rect">
+            <a:avLst/>
+          </a:prstGeom>
+        </p:spPr>
+        <p:txBody>
+          <a:bodyPr xmlns:a="http://schemas.openxmlformats.org/drawingml/2006/main"/>
+          <a:lstStyle xmlns:a="http://schemas.openxmlformats.org/drawingml/2006/main"/>
+          <a:p xmlns:a="http://schemas.openxmlformats.org/drawingml/2006/main">
+            <a:r>
+              <a:rPr lang="en-US" sz="2800" b="1">
+                <a:solidFill>
+                  <a:srgbClr val="1A202C"/>
+                </a:solidFill>
+                <a:latin typeface="Calibri"/>
+                <a:ea typeface="Calibri"/>
+              </a:rPr>
+              <a:t>Situation &amp; decision card</a:t>
+            </a:r>
+          </a:p>
+        </p:txBody>
+      </p:sp>
+      <p:sp>
+        <p:nvSpPr>
+          <p:cNvPr id="100011" name="TextBox 3"/>
+          <p:cNvSpPr txBox="1"/>
+          <p:nvPr/>
+        </p:nvSpPr>
+        <p:spPr>
+          <a:xfrm xmlns:a="http://schemas.openxmlformats.org/drawingml/2006/main">
+            <a:off x="504000" y="1224000"/>
+            <a:ext cx="11088000" cy="4968000"/>
+          </a:xfrm>
+          <a:prstGeom xmlns:a="http://schemas.openxmlformats.org/drawingml/2006/main" prst="rect">
+            <a:avLst/>
+          </a:prstGeom>
+          <a:solidFill xmlns:a="http://schemas.openxmlformats.org/drawingml/2006/main">
+            <a:srgbClr val="FFFFFF"/>
+          </a:solidFill>
+        </p:spPr>
+        <p:txBody>
+          <a:bodyPr xmlns:a="http://schemas.openxmlformats.org/drawingml/2006/main"/>
+          <a:lstStyle xmlns:a="http://schemas.openxmlformats.org/drawingml/2006/main"/>
+          <a:p xmlns:a="http://schemas.openxmlformats.org/drawingml/2006/main">
+            <a:r>
+              <a:rPr lang="en-US" sz="1300" b="0">
+                <a:solidFill>
+                  <a:srgbClr val="1A202C"/>
+                </a:solidFill>
+                <a:latin typeface="Calibri"/>
+                <a:ea typeface="Calibri"/>
+              </a:rPr>
+              <a:t>Presenter: Alex Chen — EM, Atlas Platform</a:t>
+            </a:r>
+          </a:p>
+          <a:p xmlns:a="http://schemas.openxmlformats.org/drawingml/2006/main">
+            <a:r>
+              <a:rPr lang="en-US" sz="1300" b="0">
+                <a:solidFill>
+                  <a:srgbClr val="1A202C"/>
+                </a:solidFill>
+                <a:latin typeface="Calibri"/>
+                <a:ea typeface="Calibri"/>
+              </a:rPr>
+              <a:t>Decision-maker: Morgan Lee — VP Eng (sample plan endorsement)</a:t>
+            </a:r>
+          </a:p>
+          <a:p xmlns:a="http://schemas.openxmlformats.org/drawingml/2006/main">
+            <a:r>
+              <a:rPr lang="en-US" sz="1300" b="0">
+                <a:solidFill>
+                  <a:srgbClr val="1A202C"/>
+                </a:solidFill>
+                <a:latin typeface="Calibri"/>
+                <a:ea typeface="Calibri"/>
+              </a:rPr>
+              <a:t>Audience: VP Eng, program PM, package/IO leads</a:t>
+            </a:r>
+          </a:p>
+          <a:p xmlns:a="http://schemas.openxmlformats.org/drawingml/2006/main">
+            <a:r>
+              <a:rPr lang="en-US" sz="1300" b="0">
+                <a:solidFill>
+                  <a:srgbClr val="1A202C"/>
+                </a:solidFill>
+                <a:latin typeface="Calibri"/>
+                <a:ea typeface="Calibri"/>
+              </a:rPr>
+              <a:t/>
+            </a:r>
+          </a:p>
+          <a:p xmlns:a="http://schemas.openxmlformats.org/drawingml/2006/main">
+            <a:r>
+              <a:rPr lang="en-US" sz="1300" b="0">
+                <a:solidFill>
+                  <a:srgbClr val="1A202C"/>
+                </a:solidFill>
+                <a:latin typeface="Calibri"/>
+                <a:ea typeface="Calibri"/>
+              </a:rPr>
+              <a:t>What just happened / context:</a:t>
+            </a:r>
+          </a:p>
+          <a:p xmlns:a="http://schemas.openxmlformats.org/drawingml/2006/main">
+            <a:r>
+              <a:rPr lang="en-US" sz="1300" b="0">
+                <a:solidFill>
+                  <a:srgbClr val="1A202C"/>
+                </a:solidFill>
+                <a:latin typeface="Calibri"/>
+                <a:ea typeface="Calibri"/>
+              </a:rPr>
+              <a:t>Aurora A0 returned from fab 2026-05-12. Bring-up hit Linux prompt on day 3 (target was day 5). AON Option B (decided 3/20) held freeze 4/10 → TO 4/28 → this silicon.</a:t>
+            </a:r>
+          </a:p>
+          <a:p xmlns:a="http://schemas.openxmlformats.org/drawingml/2006/main">
+            <a:r>
+              <a:rPr lang="en-US" sz="1300" b="0">
+                <a:solidFill>
+                  <a:srgbClr val="1A202C"/>
+                </a:solidFill>
+                <a:latin typeface="Calibri"/>
+                <a:ea typeface="Calibri"/>
+              </a:rPr>
+              <a:t/>
+            </a:r>
+          </a:p>
+          <a:p xmlns:a="http://schemas.openxmlformats.org/drawingml/2006/main">
+            <a:r>
+              <a:rPr lang="en-US" sz="1300" b="0">
+                <a:solidFill>
+                  <a:srgbClr val="1A202C"/>
+                </a:solidFill>
+                <a:latin typeface="Calibri"/>
+                <a:ea typeface="Calibri"/>
+              </a:rPr>
+              <a:t>Stakes if we get this wrong:</a:t>
+            </a:r>
+          </a:p>
+          <a:p xmlns:a="http://schemas.openxmlformats.org/drawingml/2006/main">
+            <a:r>
+              <a:rPr lang="en-US" sz="1300" b="0">
+                <a:solidFill>
+                  <a:srgbClr val="1A202C"/>
+                </a:solidFill>
+                <a:latin typeface="Calibri"/>
+                <a:ea typeface="Calibri"/>
+              </a:rPr>
+              <a:t>Tier-1 wants samples by 2026-06-30 for design-win demo. Delay on sample plan blocks customer schedule; USB3 still yellow but not sample-critical.</a:t>
+            </a:r>
+          </a:p>
+          <a:p xmlns:a="http://schemas.openxmlformats.org/drawingml/2006/main">
+            <a:r>
+              <a:rPr lang="en-US" sz="1300" b="0">
+                <a:solidFill>
+                  <a:srgbClr val="1A202C"/>
+                </a:solidFill>
+                <a:latin typeface="Calibri"/>
+                <a:ea typeface="Calibri"/>
+              </a:rPr>
+              <a:t/>
+            </a:r>
+          </a:p>
+          <a:p xmlns:a="http://schemas.openxmlformats.org/drawingml/2006/main">
+            <a:r>
+              <a:rPr lang="en-US" sz="1300" b="0">
+                <a:solidFill>
+                  <a:srgbClr val="1A202C"/>
+                </a:solidFill>
+                <a:latin typeface="Calibri"/>
+                <a:ea typeface="Calibri"/>
+              </a:rPr>
+              <a:t>Decision needed:</a:t>
+            </a:r>
+          </a:p>
+          <a:p xmlns:a="http://schemas.openxmlformats.org/drawingml/2006/main">
+            <a:r>
+              <a:rPr lang="en-US" sz="1300" b="0">
+                <a:solidFill>
+                  <a:srgbClr val="1A202C"/>
+                </a:solidFill>
+                <a:latin typeface="Calibri"/>
+                <a:ea typeface="Calibri"/>
+              </a:rPr>
+              <a:t>Approve customer sample plan targeting 2026-06-30 shipment (yes/no).</a:t>
+            </a:r>
+          </a:p>
+          <a:p xmlns:a="http://schemas.openxmlformats.org/drawingml/2006/main">
+            <a:r>
+              <a:rPr lang="en-US" sz="1300" b="0">
+                <a:solidFill>
+                  <a:srgbClr val="1A202C"/>
+                </a:solidFill>
+                <a:latin typeface="Calibri"/>
+                <a:ea typeface="Calibri"/>
+              </a:rPr>
+              <a:t/>
+            </a:r>
+          </a:p>
+          <a:p xmlns:a="http://schemas.openxmlformats.org/drawingml/2006/main">
+            <a:r>
+              <a:rPr lang="en-US" sz="1300" b="0">
+                <a:solidFill>
+                  <a:srgbClr val="1A202C"/>
+                </a:solidFill>
+                <a:latin typeface="Calibri"/>
+                <a:ea typeface="Calibri"/>
+              </a:rPr>
+              <a:t>Recommendation: YES — approve sample plan; keep USB3 as parallel non-blocking work.</a:t>
+            </a:r>
+          </a:p>
+          <a:p xmlns:a="http://schemas.openxmlformats.org/drawingml/2006/main">
+            <a:r>
+              <a:rPr lang="en-US" sz="1300" b="0">
+                <a:solidFill>
+                  <a:srgbClr val="1A202C"/>
+                </a:solidFill>
+                <a:latin typeface="Calibri"/>
+                <a:ea typeface="Calibri"/>
+              </a:rPr>
+              <a:t>If YES: Checklist owners fire; golden + 1 variant boards for Tier-1.</a:t>
+            </a:r>
+          </a:p>
+          <a:p xmlns:a="http://schemas.openxmlformats.org/drawingml/2006/main">
+            <a:r>
+              <a:rPr lang="en-US" sz="1300" b="0">
+                <a:solidFill>
+                  <a:srgbClr val="1A202C"/>
+                </a:solidFill>
+                <a:latin typeface="Calibri"/>
+                <a:ea typeface="Calibri"/>
+              </a:rPr>
+              <a:t>If NO / delay: Design-win demo slips; competitive window narrows.</a:t>
+            </a:r>
+          </a:p>
+          <a:p xmlns:a="http://schemas.openxmlformats.org/drawingml/2006/main">
+            <a:r>
+              <a:rPr lang="en-US" sz="1300" b="0">
+                <a:solidFill>
+                  <a:srgbClr val="1A202C"/>
+                </a:solidFill>
+                <a:latin typeface="Calibri"/>
+                <a:ea typeface="Calibri"/>
+              </a:rPr>
+              <a:t/>
+            </a:r>
+          </a:p>
+          <a:p xmlns:a="http://schemas.openxmlformats.org/drawingml/2006/main">
+            <a:r>
+              <a:rPr lang="en-US" sz="1300" b="0">
+                <a:solidFill>
+                  <a:srgbClr val="1A202C"/>
+                </a:solidFill>
+                <a:latin typeface="Calibri"/>
+                <a:ea typeface="Calibri"/>
+              </a:rPr>
+              <a:t>Decide by: 2026-05-22 steering</a:t>
+            </a:r>
+          </a:p>
+          <a:p xmlns:a="http://schemas.openxmlformats.org/drawingml/2006/main">
+            <a:r>
+              <a:rPr lang="en-US" sz="1300" b="0">
+                <a:solidFill>
+                  <a:srgbClr val="1A202C"/>
+                </a:solidFill>
+                <a:latin typeface="Calibri"/>
+                <a:ea typeface="Calibri"/>
+              </a:rPr>
+              <a:t>Arc prior: 01 AON Option B → freeze 4/10 → TO 4/28 → silicon 5/12</a:t>
+            </a:r>
+          </a:p>
+          <a:p xmlns:a="http://schemas.openxmlformats.org/drawingml/2006/main">
+            <a:r>
+              <a:rPr lang="en-US" sz="1300" b="0">
+                <a:solidFill>
+                  <a:srgbClr val="1A202C"/>
+                </a:solidFill>
+                <a:latin typeface="Calibri"/>
+                <a:ea typeface="Calibri"/>
+              </a:rPr>
+              <a:t>Arc next: 03 org health (people yellow) · 06 +1 DV if sample surge</a:t>
+            </a:r>
+          </a:p>
+        </p:txBody>
+      </p:sp>
+      <p:sp>
+        <p:nvSpPr>
+          <p:cNvPr id="100012" name="TextBox 4"/>
+          <p:cNvSpPr txBox="1"/>
+          <p:nvPr/>
+        </p:nvSpPr>
+        <p:spPr>
+          <a:xfrm xmlns:a="http://schemas.openxmlformats.org/drawingml/2006/main">
+            <a:off x="504000" y="6426000"/>
+            <a:ext cx="11088000" cy="306000"/>
+          </a:xfrm>
+          <a:prstGeom xmlns:a="http://schemas.openxmlformats.org/drawingml/2006/main" prst="rect">
+            <a:avLst/>
+          </a:prstGeom>
+        </p:spPr>
+        <p:txBody>
+          <a:bodyPr xmlns:a="http://schemas.openxmlformats.org/drawingml/2006/main"/>
+          <a:lstStyle xmlns:a="http://schemas.openxmlformats.org/drawingml/2006/main"/>
+          <a:p xmlns:a="http://schemas.openxmlformats.org/drawingml/2006/main">
+            <a:r>
+              <a:rPr lang="en-US" sz="1100" b="0">
+                <a:solidFill>
+                  <a:srgbClr val="718096"/>
+                </a:solidFill>
+                <a:latin typeface="Calibri"/>
+                <a:ea typeface="Calibri"/>
+              </a:rPr>
+              <a:t>Atlas Platform  ·  Project Aurora  ·  NovaSemi  ·  2026</a:t>
+            </a:r>
+          </a:p>
+        </p:txBody>
+      </p:sp>
+    </p:spTree>
+  </p:cSld>
+</p:sld>
+</file>
+
+<file path=ppt/slides/slide4.xml><?xml version="1.0" encoding="utf-8"?>
+<p:sld xmlns:p="http://schemas.openxmlformats.org/presentationml/2006/main">
   <p:cSld name="BLUF — first silicon green on critical path">
     <p:bg>
       <p:bgPr>
@@ -1676,7 +2113,7 @@
       <p:grpSpPr/>
       <p:sp>
         <p:nvSpPr>
-          <p:cNvPr id="100009" name="TextBox 1"/>
+          <p:cNvPr id="100013" name="TextBox 1"/>
           <p:cNvSpPr txBox="1"/>
           <p:nvPr/>
         </p:nvSpPr>
@@ -1708,7 +2145,7 @@
       </p:sp>
       <p:sp>
         <p:nvSpPr>
-          <p:cNvPr id="100010" name="TextBox 2"/>
+          <p:cNvPr id="100014" name="TextBox 2"/>
           <p:cNvSpPr txBox="1"/>
           <p:nvPr/>
         </p:nvSpPr>
@@ -1740,7 +2177,7 @@
       </p:sp>
       <p:sp>
         <p:nvSpPr>
-          <p:cNvPr id="100011" name="TextBox 3"/>
+          <p:cNvPr id="100015" name="TextBox 3"/>
           <p:cNvSpPr txBox="1"/>
           <p:nvPr/>
         </p:nvSpPr>
@@ -1775,7 +2212,7 @@
       </p:sp>
       <p:sp>
         <p:nvSpPr>
-          <p:cNvPr id="100012" name="TextBox 4"/>
+          <p:cNvPr id="100016" name="TextBox 4"/>
           <p:cNvSpPr txBox="1"/>
           <p:nvPr/>
         </p:nvSpPr>
@@ -1870,7 +2307,7 @@
       </p:sp>
       <p:sp>
         <p:nvSpPr>
-          <p:cNvPr id="100013" name="TextBox 5"/>
+          <p:cNvPr id="100017" name="TextBox 5"/>
           <p:cNvSpPr txBox="1"/>
           <p:nvPr/>
         </p:nvSpPr>
@@ -1905,7 +2342,7 @@
 </p:sld>
 </file>
 
-<file path=ppt/slides/slide4.xml><?xml version="1.0" encoding="utf-8"?>
+<file path=ppt/slides/slide5.xml><?xml version="1.0" encoding="utf-8"?>
 <p:sld xmlns:p="http://schemas.openxmlformats.org/presentationml/2006/main">
   <p:cSld name="Goal recall (period start)">
     <p:bg>
@@ -1924,7 +2361,7 @@
       <p:grpSpPr/>
       <p:sp>
         <p:nvSpPr>
-          <p:cNvPr id="100014" name="TextBox 1"/>
+          <p:cNvPr id="100018" name="TextBox 1"/>
           <p:cNvSpPr txBox="1"/>
           <p:nvPr/>
         </p:nvSpPr>
@@ -1956,7 +2393,7 @@
       </p:sp>
       <p:sp>
         <p:nvSpPr>
-          <p:cNvPr id="100015" name="TextBox 2"/>
+          <p:cNvPr id="100019" name="TextBox 2"/>
           <p:cNvSpPr txBox="1"/>
           <p:nvPr/>
         </p:nvSpPr>
@@ -2015,7 +2452,7 @@
       </p:sp>
       <p:sp>
         <p:nvSpPr>
-          <p:cNvPr id="100016" name="TextBox 3"/>
+          <p:cNvPr id="100020" name="TextBox 3"/>
           <p:cNvSpPr txBox="1"/>
           <p:nvPr/>
         </p:nvSpPr>
@@ -2050,7 +2487,7 @@
 </p:sld>
 </file>
 
-<file path=ppt/slides/slide5.xml><?xml version="1.0" encoding="utf-8"?>
+<file path=ppt/slides/slide6.xml><?xml version="1.0" encoding="utf-8"?>
 <p:sld xmlns:p="http://schemas.openxmlformats.org/presentationml/2006/main">
   <p:cSld name="Outcome metrics">
     <p:bg>
@@ -2069,7 +2506,7 @@
       <p:grpSpPr/>
       <p:sp>
         <p:nvSpPr>
-          <p:cNvPr id="100017" name="TextBox 1"/>
+          <p:cNvPr id="100021" name="TextBox 1"/>
           <p:cNvSpPr txBox="1"/>
           <p:nvPr/>
         </p:nvSpPr>
@@ -2101,7 +2538,7 @@
       </p:sp>
       <p:sp>
         <p:nvSpPr>
-          <p:cNvPr id="100018" name="TextBox 2"/>
+          <p:cNvPr id="100022" name="TextBox 2"/>
           <p:cNvSpPr txBox="1"/>
           <p:nvPr/>
         </p:nvSpPr>
@@ -2172,7 +2609,7 @@
       </p:sp>
       <p:sp>
         <p:nvSpPr>
-          <p:cNvPr id="100019" name="TextBox 3"/>
+          <p:cNvPr id="100023" name="TextBox 3"/>
           <p:cNvSpPr txBox="1"/>
           <p:nvPr/>
         </p:nvSpPr>
@@ -2207,7 +2644,7 @@
 </p:sld>
 </file>
 
-<file path=ppt/slides/slide6.xml><?xml version="1.0" encoding="utf-8"?>
+<file path=ppt/slides/slide7.xml><?xml version="1.0" encoding="utf-8"?>
 <p:sld xmlns:p="http://schemas.openxmlformats.org/presentationml/2006/main">
   <p:cSld name="How we got here + learnings">
     <p:bg>
@@ -2226,7 +2663,7 @@
       <p:grpSpPr/>
       <p:sp>
         <p:nvSpPr>
-          <p:cNvPr id="100020" name="TextBox 1"/>
+          <p:cNvPr id="100024" name="TextBox 1"/>
           <p:cNvSpPr txBox="1"/>
           <p:nvPr/>
         </p:nvSpPr>
@@ -2258,7 +2695,7 @@
       </p:sp>
       <p:sp>
         <p:nvSpPr>
-          <p:cNvPr id="100021" name="TextBox 2"/>
+          <p:cNvPr id="100025" name="TextBox 2"/>
           <p:cNvSpPr txBox="1"/>
           <p:nvPr/>
         </p:nvSpPr>
@@ -2341,7 +2778,7 @@
       </p:sp>
       <p:sp>
         <p:nvSpPr>
-          <p:cNvPr id="100022" name="TextBox 3"/>
+          <p:cNvPr id="100026" name="TextBox 3"/>
           <p:cNvSpPr txBox="1"/>
           <p:nvPr/>
         </p:nvSpPr>
@@ -2376,7 +2813,7 @@
 </p:sld>
 </file>
 
-<file path=ppt/slides/slide7.xml><?xml version="1.0" encoding="utf-8"?>
+<file path=ppt/slides/slide8.xml><?xml version="1.0" encoding="utf-8"?>
 <p:sld xmlns:p="http://schemas.openxmlformats.org/presentationml/2006/main">
   <p:cSld name="Options &amp; recommendation">
     <p:bg>
@@ -2395,7 +2832,7 @@
       <p:grpSpPr/>
       <p:sp>
         <p:nvSpPr>
-          <p:cNvPr id="100023" name="TextBox 1"/>
+          <p:cNvPr id="100027" name="TextBox 1"/>
           <p:cNvSpPr txBox="1"/>
           <p:nvPr/>
         </p:nvSpPr>
@@ -2427,7 +2864,7 @@
       </p:sp>
       <p:sp>
         <p:nvSpPr>
-          <p:cNvPr id="100024" name="TextBox 2"/>
+          <p:cNvPr id="100028" name="TextBox 2"/>
           <p:cNvSpPr txBox="1"/>
           <p:nvPr/>
         </p:nvSpPr>
@@ -2459,7 +2896,7 @@
       </p:sp>
       <p:graphicFrame>
         <p:nvGraphicFramePr>
-          <p:cNvPr id="100025" name="Table 1"/>
+          <p:cNvPr id="100029" name="Table 1"/>
           <p:cNvGraphicFramePr/>
           <p:nvPr/>
         </p:nvGraphicFramePr>
@@ -2859,7 +3296,7 @@
       </p:graphicFrame>
       <p:sp>
         <p:nvSpPr>
-          <p:cNvPr id="100026" name="TextBox 3"/>
+          <p:cNvPr id="100030" name="TextBox 3"/>
           <p:cNvSpPr txBox="1"/>
           <p:nvPr/>
         </p:nvSpPr>
@@ -2894,7 +3331,7 @@
 </p:sld>
 </file>
 
-<file path=ppt/slides/slide8.xml><?xml version="1.0" encoding="utf-8"?>
+<file path=ppt/slides/slide9.xml><?xml version="1.0" encoding="utf-8"?>
 <p:sld xmlns:p="http://schemas.openxmlformats.org/presentationml/2006/main">
   <p:cSld name="Decision &amp; ask">
     <p:bg>
@@ -2913,7 +3350,7 @@
       <p:grpSpPr/>
       <p:sp>
         <p:nvSpPr>
-          <p:cNvPr id="100027" name="TextBox 1"/>
+          <p:cNvPr id="100031" name="TextBox 1"/>
           <p:cNvSpPr txBox="1"/>
           <p:nvPr/>
         </p:nvSpPr>
@@ -2945,7 +3382,7 @@
       </p:sp>
       <p:sp>
         <p:nvSpPr>
-          <p:cNvPr id="100028" name="TextBox 2"/>
+          <p:cNvPr id="100032" name="TextBox 2"/>
           <p:cNvSpPr txBox="1"/>
           <p:nvPr/>
         </p:nvSpPr>
@@ -2977,7 +3414,7 @@
       </p:sp>
       <p:sp>
         <p:nvSpPr>
-          <p:cNvPr id="100029" name="TextBox 3"/>
+          <p:cNvPr id="100033" name="TextBox 3"/>
           <p:cNvSpPr txBox="1"/>
           <p:nvPr/>
         </p:nvSpPr>
@@ -3060,7 +3497,7 @@
       </p:sp>
       <p:sp>
         <p:nvSpPr>
-          <p:cNvPr id="100030" name="TextBox 4"/>
+          <p:cNvPr id="100034" name="TextBox 4"/>
           <p:cNvSpPr txBox="1"/>
           <p:nvPr/>
         </p:nvSpPr>

--- a/skills/presentations/assets/pptx/examples/02-results-demo.pptx
+++ b/skills/presentations/assets/pptx/examples/02-results-demo.pptx
@@ -5,18 +5,18 @@
     <p:sldMasterId xmlns:r="http://schemas.openxmlformats.org/officeDocument/2006/relationships" id="2147483648" r:id="rId1"/>
   </p:sldMasterIdLst>
   <p:notesMasterIdLst>
-    <p:notesMasterId r:id="Rd5a4814f5eff4473"/>
+    <p:notesMasterId r:id="Rd1bed1add135417a"/>
   </p:notesMasterIdLst>
   <p:sldIdLst>
-    <p:sldId id="256" r:id="R5c95986e3e8a4dc9"/>
-    <p:sldId id="257" r:id="R0368bf4f75404c8a"/>
-    <p:sldId id="258" r:id="R2dd9edbfc48149c1"/>
-    <p:sldId id="259" r:id="R38a2c70459d6401f"/>
-    <p:sldId id="260" r:id="R4f99bf01a71241e4"/>
-    <p:sldId id="261" r:id="Rd36157b6ebdb4fc6"/>
-    <p:sldId id="262" r:id="Rc9baf2b89b344868"/>
-    <p:sldId id="263" r:id="R8b60cff412b34854"/>
-    <p:sldId id="264" r:id="R18e3919b7bf641fc"/>
+    <p:sldId id="256" r:id="R3c639760e9d34cbb"/>
+    <p:sldId id="257" r:id="R03d1d63091aa470b"/>
+    <p:sldId id="258" r:id="Re2b426e2e31f457a"/>
+    <p:sldId id="259" r:id="R354b327585d34c04"/>
+    <p:sldId id="260" r:id="Re50f92452f10495a"/>
+    <p:sldId id="261" r:id="R550a95c3a3954d8b"/>
+    <p:sldId id="262" r:id="Rcb495fea1bb04e40"/>
+    <p:sldId id="263" r:id="Rb05d3dd5c50b4dda"/>
+    <p:sldId id="264" r:id="R0eedf50919794e76"/>
   </p:sldIdLst>
   <p:sldSz cx="12192000" cy="6858000"/>
   <p:notesSz cx="6858000" cy="9144000"/>

--- a/skills/presentations/assets/pptx/examples/02-results-demo.pptx
+++ b/skills/presentations/assets/pptx/examples/02-results-demo.pptx
@@ -5,18 +5,18 @@
     <p:sldMasterId xmlns:r="http://schemas.openxmlformats.org/officeDocument/2006/relationships" id="2147483648" r:id="rId1"/>
   </p:sldMasterIdLst>
   <p:notesMasterIdLst>
-    <p:notesMasterId r:id="Rd1bed1add135417a"/>
+    <p:notesMasterId r:id="R728e7a9da13e4736"/>
   </p:notesMasterIdLst>
   <p:sldIdLst>
-    <p:sldId id="256" r:id="R3c639760e9d34cbb"/>
-    <p:sldId id="257" r:id="R03d1d63091aa470b"/>
-    <p:sldId id="258" r:id="Re2b426e2e31f457a"/>
-    <p:sldId id="259" r:id="R354b327585d34c04"/>
-    <p:sldId id="260" r:id="Re50f92452f10495a"/>
-    <p:sldId id="261" r:id="R550a95c3a3954d8b"/>
-    <p:sldId id="262" r:id="Rcb495fea1bb04e40"/>
-    <p:sldId id="263" r:id="Rb05d3dd5c50b4dda"/>
-    <p:sldId id="264" r:id="R0eedf50919794e76"/>
+    <p:sldId id="256" r:id="Rd066cfce782846d5"/>
+    <p:sldId id="257" r:id="R125bfb3849f44263"/>
+    <p:sldId id="258" r:id="Rb2c2ebdae0474b1a"/>
+    <p:sldId id="259" r:id="R3f4902ff7a0f49b5"/>
+    <p:sldId id="260" r:id="Re93841c456044f27"/>
+    <p:sldId id="261" r:id="R98bff2cd8a64449c"/>
+    <p:sldId id="262" r:id="Rb9eb643a92704c26"/>
+    <p:sldId id="263" r:id="R01d0ab104a084577"/>
+    <p:sldId id="264" r:id="R4bc4b3d5fcac4da8"/>
   </p:sldIdLst>
   <p:sldSz cx="12192000" cy="6858000"/>
   <p:notesSz cx="6858000" cy="9144000"/>
@@ -1671,7 +1671,19 @@
                 <a:latin typeface="Calibri"/>
                 <a:ea typeface="Calibri"/>
               </a:rPr>
-              <a:t>In-repo: skills/presentations/classic-public-cases.md</a:t>
+              <a:t>CONTENT TEMPLATE ONLY — do not copy visual design (colors, margins, fonts) as a brand system.</a:t>
+            </a:r>
+          </a:p>
+          <a:p xmlns:a="http://schemas.openxmlformats.org/drawingml/2006/main">
+            <a:r>
+              <a:rPr lang="en-US" sz="1500" b="0">
+                <a:solidFill>
+                  <a:srgbClr val="1A202C"/>
+                </a:solidFill>
+                <a:latin typeface="Calibri"/>
+                <a:ea typeface="Calibri"/>
+              </a:rPr>
+              <a:t>In-repo: skills/presentations/classic-public-cases.md · assets/README.md (agent notice)</a:t>
             </a:r>
           </a:p>
         </p:txBody>
